--- a/Blazor-Intro.pptx
+++ b/Blazor-Intro.pptx
@@ -5,7 +5,7 @@
     <p:sldMasterId id="2147483648" r:id="rId1"/>
   </p:sldMasterIdLst>
   <p:notesMasterIdLst>
-    <p:notesMasterId r:id="rId16"/>
+    <p:notesMasterId r:id="rId17"/>
   </p:notesMasterIdLst>
   <p:sldIdLst>
     <p:sldId id="301" r:id="rId2"/>
@@ -19,17 +19,18 @@
     <p:sldId id="305" r:id="rId10"/>
     <p:sldId id="306" r:id="rId11"/>
     <p:sldId id="307" r:id="rId12"/>
-    <p:sldId id="298" r:id="rId13"/>
-    <p:sldId id="288" r:id="rId14"/>
-    <p:sldId id="265" r:id="rId15"/>
+    <p:sldId id="309" r:id="rId13"/>
+    <p:sldId id="298" r:id="rId14"/>
+    <p:sldId id="288" r:id="rId15"/>
+    <p:sldId id="265" r:id="rId16"/>
   </p:sldIdLst>
   <p:sldSz cx="18288000" cy="10287000"/>
   <p:notesSz cx="6858000" cy="9144000"/>
   <p:embeddedFontLst>
     <p:embeddedFont>
       <p:font typeface="Open Sans Bold" panose="020B0806030504020204" pitchFamily="34" charset="0"/>
-      <p:regular r:id="rId17"/>
-      <p:bold r:id="rId18"/>
+      <p:regular r:id="rId18"/>
+      <p:bold r:id="rId19"/>
     </p:embeddedFont>
   </p:embeddedFontLst>
   <p:defaultTextStyle>
@@ -152,6 +153,7 @@
     <p1510:client id="{05985CB2-FB70-CC72-8730-7B2910B979A3}" v="2675" dt="2025-05-08T13:56:16.839"/>
     <p1510:client id="{2EB0BDF1-980A-1FE0-0AB5-ED8FD2235780}" v="78" dt="2025-05-07T20:55:12.043"/>
     <p1510:client id="{76A63F6B-A53B-94B2-913A-C934649FC1F3}" v="191" dt="2025-05-08T14:04:00.640"/>
+    <p1510:client id="{9E2FACEB-9917-51DC-C438-8D184638ECC8}" v="55" dt="2025-05-08T16:44:12.238"/>
     <p1510:client id="{CA81D63C-1861-C74C-DFF2-0172AD3F97B0}" v="184" dt="2025-05-08T12:01:25.736"/>
     <p1510:client id="{E21EEC07-E453-B853-F084-A27006576CB3}" v="67" dt="2025-05-08T15:04:10.558"/>
   </p1510:revLst>
@@ -634,6 +636,140 @@
         <p:cNvPr id="1" name="">
           <a:extLst>
             <a:ext uri="{FF2B5EF4-FFF2-40B4-BE49-F238E27FC236}">
+              <a16:creationId xmlns:a16="http://schemas.microsoft.com/office/drawing/2014/main" id="{EFEE20AD-880D-3181-8C51-1A5F675ACF7A}"/>
+            </a:ext>
+          </a:extLst>
+        </p:cNvPr>
+        <p:cNvGrpSpPr/>
+        <p:nvPr/>
+      </p:nvGrpSpPr>
+      <p:grpSpPr>
+        <a:xfrm>
+          <a:off x="0" y="0"/>
+          <a:ext cx="0" cy="0"/>
+          <a:chOff x="0" y="0"/>
+          <a:chExt cx="0" cy="0"/>
+        </a:xfrm>
+      </p:grpSpPr>
+      <p:sp>
+        <p:nvSpPr>
+          <p:cNvPr id="2" name="Tijdelijke aanduiding voor dia-afbeelding 1">
+            <a:extLst>
+              <a:ext uri="{FF2B5EF4-FFF2-40B4-BE49-F238E27FC236}">
+                <a16:creationId xmlns:a16="http://schemas.microsoft.com/office/drawing/2014/main" id="{DE73E256-FA40-9F4C-7C25-F208275B43AA}"/>
+              </a:ext>
+            </a:extLst>
+          </p:cNvPr>
+          <p:cNvSpPr>
+            <a:spLocks noGrp="1" noRot="1" noChangeAspect="1"/>
+          </p:cNvSpPr>
+          <p:nvPr>
+            <p:ph type="sldImg"/>
+          </p:nvPr>
+        </p:nvSpPr>
+        <p:spPr/>
+      </p:sp>
+      <p:sp>
+        <p:nvSpPr>
+          <p:cNvPr id="3" name="Tijdelijke aanduiding voor notities 2">
+            <a:extLst>
+              <a:ext uri="{FF2B5EF4-FFF2-40B4-BE49-F238E27FC236}">
+                <a16:creationId xmlns:a16="http://schemas.microsoft.com/office/drawing/2014/main" id="{949130CC-FB40-B6DF-24C5-D0DEBB600502}"/>
+              </a:ext>
+            </a:extLst>
+          </p:cNvPr>
+          <p:cNvSpPr>
+            <a:spLocks noGrp="1"/>
+          </p:cNvSpPr>
+          <p:nvPr>
+            <p:ph type="body" idx="1"/>
+          </p:nvPr>
+        </p:nvSpPr>
+        <p:spPr/>
+        <p:txBody>
+          <a:bodyPr/>
+          <a:lstStyle/>
+          <a:p>
+            <a:r>
+              <a:rPr lang="nl-BE"/>
+              <a:t>In postgres</a:t>
+            </a:r>
+          </a:p>
+          <a:p>
+            <a:r>
+              <a:rPr lang="nl-BE"/>
+              <a:t>Elke connectie is een OS </a:t>
+            </a:r>
+            <a:r>
+              <a:rPr lang="nl-BE" err="1"/>
+              <a:t>process</a:t>
+            </a:r>
+            <a:endParaRPr lang="nl-BE"/>
+          </a:p>
+          <a:p>
+            <a:r>
+              <a:rPr lang="nl-BE"/>
+              <a:t>Elk proces neemt 5 tot 10 MB RAM in</a:t>
+            </a:r>
+          </a:p>
+          <a:p>
+            <a:r>
+              <a:rPr lang="nl-BE"/>
+              <a:t>En de CPU moet switchen tussen deze contexten</a:t>
+            </a:r>
+          </a:p>
+        </p:txBody>
+      </p:sp>
+      <p:sp>
+        <p:nvSpPr>
+          <p:cNvPr id="4" name="Tijdelijke aanduiding voor dianummer 3">
+            <a:extLst>
+              <a:ext uri="{FF2B5EF4-FFF2-40B4-BE49-F238E27FC236}">
+                <a16:creationId xmlns:a16="http://schemas.microsoft.com/office/drawing/2014/main" id="{ACB79312-CA2D-C4E8-07EE-0BC212E3BCA2}"/>
+              </a:ext>
+            </a:extLst>
+          </p:cNvPr>
+          <p:cNvSpPr>
+            <a:spLocks noGrp="1"/>
+          </p:cNvSpPr>
+          <p:nvPr>
+            <p:ph type="sldNum" sz="quarter" idx="5"/>
+          </p:nvPr>
+        </p:nvSpPr>
+        <p:spPr/>
+        <p:txBody>
+          <a:bodyPr/>
+          <a:lstStyle/>
+          <a:p>
+            <a:fld id="{D184C4F5-CD59-42E8-BA39-B822E856E564}" type="slidenum">
+              <a:rPr lang="nl-BE" smtClean="0"/>
+              <a:t>12</a:t>
+            </a:fld>
+            <a:endParaRPr lang="nl-BE"/>
+          </a:p>
+        </p:txBody>
+      </p:sp>
+    </p:spTree>
+    <p:extLst>
+      <p:ext uri="{BB962C8B-B14F-4D97-AF65-F5344CB8AC3E}">
+        <p14:creationId xmlns:p14="http://schemas.microsoft.com/office/powerpoint/2010/main" val="712050950"/>
+      </p:ext>
+    </p:extLst>
+  </p:cSld>
+  <p:clrMapOvr>
+    <a:masterClrMapping/>
+  </p:clrMapOvr>
+</p:notes>
+</file>
+
+<file path=ppt/notesSlides/notesSlide11.xml><?xml version="1.0" encoding="utf-8"?>
+<p:notes xmlns:a="http://schemas.openxmlformats.org/drawingml/2006/main" xmlns:r="http://schemas.openxmlformats.org/officeDocument/2006/relationships" xmlns:p="http://schemas.openxmlformats.org/presentationml/2006/main">
+  <p:cSld>
+    <p:spTree>
+      <p:nvGrpSpPr>
+        <p:cNvPr id="1" name="">
+          <a:extLst>
+            <a:ext uri="{FF2B5EF4-FFF2-40B4-BE49-F238E27FC236}">
               <a16:creationId xmlns:a16="http://schemas.microsoft.com/office/drawing/2014/main" id="{92FC968A-4354-4554-DB0A-91A525658897}"/>
             </a:ext>
           </a:extLst>
@@ -734,7 +870,7 @@
 </p:notes>
 </file>
 
-<file path=ppt/notesSlides/notesSlide11.xml><?xml version="1.0" encoding="utf-8"?>
+<file path=ppt/notesSlides/notesSlide12.xml><?xml version="1.0" encoding="utf-8"?>
 <p:notes xmlns:a="http://schemas.openxmlformats.org/drawingml/2006/main" xmlns:r="http://schemas.openxmlformats.org/officeDocument/2006/relationships" xmlns:p="http://schemas.openxmlformats.org/presentationml/2006/main">
   <p:cSld>
     <p:spTree>
@@ -1251,7 +1387,7 @@
           <a:p>
             <a:fld id="{D184C4F5-CD59-42E8-BA39-B822E856E564}" type="slidenum">
               <a:rPr lang="nl-BE" smtClean="0"/>
-              <a:t>6</a:t>
+              <a:t>4</a:t>
             </a:fld>
             <a:endParaRPr lang="nl-BE"/>
           </a:p>
@@ -8751,6 +8887,631 @@
     <p:bg>
       <p:bgPr>
         <a:solidFill>
+          <a:srgbClr val="171717"/>
+        </a:solidFill>
+        <a:effectLst/>
+      </p:bgPr>
+    </p:bg>
+    <p:spTree>
+      <p:nvGrpSpPr>
+        <p:cNvPr id="1" name="">
+          <a:extLst>
+            <a:ext uri="{FF2B5EF4-FFF2-40B4-BE49-F238E27FC236}">
+              <a16:creationId xmlns:a16="http://schemas.microsoft.com/office/drawing/2014/main" id="{851D9311-1353-B5C9-12A7-667940DBBAFD}"/>
+            </a:ext>
+          </a:extLst>
+        </p:cNvPr>
+        <p:cNvGrpSpPr/>
+        <p:nvPr/>
+      </p:nvGrpSpPr>
+      <p:grpSpPr>
+        <a:xfrm>
+          <a:off x="0" y="0"/>
+          <a:ext cx="0" cy="0"/>
+          <a:chOff x="0" y="0"/>
+          <a:chExt cx="0" cy="0"/>
+        </a:xfrm>
+      </p:grpSpPr>
+      <p:pic>
+        <p:nvPicPr>
+          <p:cNvPr id="5" name="Picture 5">
+            <a:extLst>
+              <a:ext uri="{FF2B5EF4-FFF2-40B4-BE49-F238E27FC236}">
+                <a16:creationId xmlns:a16="http://schemas.microsoft.com/office/drawing/2014/main" id="{499BB9D2-4404-9214-AE6D-41EA40862C8E}"/>
+              </a:ext>
+            </a:extLst>
+          </p:cNvPr>
+          <p:cNvPicPr>
+            <a:picLocks noChangeAspect="1"/>
+          </p:cNvPicPr>
+          <p:nvPr/>
+        </p:nvPicPr>
+        <p:blipFill>
+          <a:blip r:embed="rId3" cstate="print">
+            <a:extLst>
+              <a:ext uri="{28A0092B-C50C-407E-A947-70E740481C1C}">
+                <a14:useLocalDpi xmlns:a14="http://schemas.microsoft.com/office/drawing/2010/main" val="0"/>
+              </a:ext>
+              <a:ext uri="{96DAC541-7B7A-43D3-8B79-37D633B846F1}">
+                <asvg:svgBlip xmlns:asvg="http://schemas.microsoft.com/office/drawing/2016/SVG/main" r:embed="rId4"/>
+              </a:ext>
+            </a:extLst>
+          </a:blip>
+          <a:srcRect/>
+          <a:stretch>
+            <a:fillRect/>
+          </a:stretch>
+        </p:blipFill>
+        <p:spPr>
+          <a:xfrm rot="5400000">
+            <a:off x="9937881" y="9306279"/>
+            <a:ext cx="518462" cy="816476"/>
+          </a:xfrm>
+          <a:prstGeom prst="rect">
+            <a:avLst/>
+          </a:prstGeom>
+        </p:spPr>
+      </p:pic>
+      <p:pic>
+        <p:nvPicPr>
+          <p:cNvPr id="9" name="Picture 9">
+            <a:extLst>
+              <a:ext uri="{FF2B5EF4-FFF2-40B4-BE49-F238E27FC236}">
+                <a16:creationId xmlns:a16="http://schemas.microsoft.com/office/drawing/2014/main" id="{F38EA113-60BC-14D5-1EEC-BDE452943437}"/>
+              </a:ext>
+            </a:extLst>
+          </p:cNvPr>
+          <p:cNvPicPr>
+            <a:picLocks noChangeAspect="1"/>
+          </p:cNvPicPr>
+          <p:nvPr/>
+        </p:nvPicPr>
+        <p:blipFill>
+          <a:blip r:embed="rId5">
+            <a:extLst>
+              <a:ext uri="{28A0092B-C50C-407E-A947-70E740481C1C}">
+                <a14:useLocalDpi xmlns:a14="http://schemas.microsoft.com/office/drawing/2010/main" val="0"/>
+              </a:ext>
+              <a:ext uri="{96DAC541-7B7A-43D3-8B79-37D633B846F1}">
+                <asvg:svgBlip xmlns:asvg="http://schemas.microsoft.com/office/drawing/2016/SVG/main" r:embed="rId6"/>
+              </a:ext>
+            </a:extLst>
+          </a:blip>
+          <a:srcRect l="27156" t="39024"/>
+          <a:stretch>
+            <a:fillRect/>
+          </a:stretch>
+        </p:blipFill>
+        <p:spPr>
+          <a:xfrm>
+            <a:off x="-12221" y="-9525"/>
+            <a:ext cx="1040921" cy="1011697"/>
+          </a:xfrm>
+          <a:prstGeom prst="rect">
+            <a:avLst/>
+          </a:prstGeom>
+        </p:spPr>
+      </p:pic>
+      <p:pic>
+        <p:nvPicPr>
+          <p:cNvPr id="10" name="Picture 10">
+            <a:extLst>
+              <a:ext uri="{FF2B5EF4-FFF2-40B4-BE49-F238E27FC236}">
+                <a16:creationId xmlns:a16="http://schemas.microsoft.com/office/drawing/2014/main" id="{6CA52AB3-352B-3E27-B78B-5AC7F9429079}"/>
+              </a:ext>
+            </a:extLst>
+          </p:cNvPr>
+          <p:cNvPicPr>
+            <a:picLocks noChangeAspect="1"/>
+          </p:cNvPicPr>
+          <p:nvPr/>
+        </p:nvPicPr>
+        <p:blipFill>
+          <a:blip r:embed="rId7"/>
+          <a:srcRect/>
+          <a:stretch>
+            <a:fillRect/>
+          </a:stretch>
+        </p:blipFill>
+        <p:spPr>
+          <a:xfrm>
+            <a:off x="1224828" y="347917"/>
+            <a:ext cx="2139855" cy="578652"/>
+          </a:xfrm>
+          <a:prstGeom prst="rect">
+            <a:avLst/>
+          </a:prstGeom>
+        </p:spPr>
+      </p:pic>
+      <p:sp>
+        <p:nvSpPr>
+          <p:cNvPr id="12" name="Tekstvak 11">
+            <a:extLst>
+              <a:ext uri="{FF2B5EF4-FFF2-40B4-BE49-F238E27FC236}">
+                <a16:creationId xmlns:a16="http://schemas.microsoft.com/office/drawing/2014/main" id="{A1DFA4F1-2613-F3DF-0466-8AE49B7F445C}"/>
+              </a:ext>
+            </a:extLst>
+          </p:cNvPr>
+          <p:cNvSpPr txBox="1"/>
+          <p:nvPr/>
+        </p:nvSpPr>
+        <p:spPr>
+          <a:xfrm>
+            <a:off x="661718" y="1003111"/>
+            <a:ext cx="8086505" cy="923330"/>
+          </a:xfrm>
+          <a:prstGeom prst="rect">
+            <a:avLst/>
+          </a:prstGeom>
+          <a:noFill/>
+        </p:spPr>
+        <p:txBody>
+          <a:bodyPr wrap="square" lIns="91440" tIns="45720" rIns="91440" bIns="45720" rtlCol="0" anchor="t">
+            <a:spAutoFit/>
+          </a:bodyPr>
+          <a:lstStyle/>
+          <a:p>
+            <a:r>
+              <a:rPr lang="nl-BE" sz="5400" b="1" dirty="0">
+                <a:solidFill>
+                  <a:srgbClr val="E8870A"/>
+                </a:solidFill>
+                <a:latin typeface="Open Sans Bold"/>
+                <a:ea typeface="Calibri"/>
+                <a:cs typeface="Calibri"/>
+              </a:rPr>
+              <a:t>Links</a:t>
+            </a:r>
+          </a:p>
+        </p:txBody>
+      </p:sp>
+      <p:sp>
+        <p:nvSpPr>
+          <p:cNvPr id="3" name="Content Placeholder 17">
+            <a:extLst>
+              <a:ext uri="{FF2B5EF4-FFF2-40B4-BE49-F238E27FC236}">
+                <a16:creationId xmlns:a16="http://schemas.microsoft.com/office/drawing/2014/main" id="{EB4C4FAF-2130-6730-5272-E0F56EA289BC}"/>
+              </a:ext>
+            </a:extLst>
+          </p:cNvPr>
+          <p:cNvSpPr txBox="1">
+            <a:spLocks/>
+          </p:cNvSpPr>
+          <p:nvPr/>
+        </p:nvSpPr>
+        <p:spPr>
+          <a:xfrm>
+            <a:off x="662077" y="2419709"/>
+            <a:ext cx="8472219" cy="5027373"/>
+          </a:xfrm>
+          <a:prstGeom prst="rect">
+            <a:avLst/>
+          </a:prstGeom>
+        </p:spPr>
+        <p:txBody>
+          <a:bodyPr vert="horz" lIns="91440" tIns="45720" rIns="91440" bIns="45720" rtlCol="0" anchor="t">
+            <a:noAutofit/>
+          </a:bodyPr>
+          <a:lstStyle>
+            <a:lvl1pPr marL="342900" indent="-342900" algn="l" defTabSz="914400" rtl="0" eaLnBrk="1" latinLnBrk="0" hangingPunct="1">
+              <a:spcBef>
+                <a:spcPct val="20000"/>
+              </a:spcBef>
+              <a:buFont typeface="Arial" pitchFamily="34" charset="0"/>
+              <a:buChar char="•"/>
+              <a:defRPr sz="3200" kern="1200">
+                <a:solidFill>
+                  <a:schemeClr val="tx1"/>
+                </a:solidFill>
+                <a:latin typeface="+mn-lt"/>
+                <a:ea typeface="+mn-ea"/>
+                <a:cs typeface="+mn-cs"/>
+              </a:defRPr>
+            </a:lvl1pPr>
+            <a:lvl2pPr marL="742950" indent="-285750" algn="l" defTabSz="914400" rtl="0" eaLnBrk="1" latinLnBrk="0" hangingPunct="1">
+              <a:spcBef>
+                <a:spcPct val="20000"/>
+              </a:spcBef>
+              <a:buFont typeface="Arial" pitchFamily="34" charset="0"/>
+              <a:buChar char="–"/>
+              <a:defRPr sz="2800" kern="1200">
+                <a:solidFill>
+                  <a:schemeClr val="tx1"/>
+                </a:solidFill>
+                <a:latin typeface="+mn-lt"/>
+                <a:ea typeface="+mn-ea"/>
+                <a:cs typeface="+mn-cs"/>
+              </a:defRPr>
+            </a:lvl2pPr>
+            <a:lvl3pPr marL="1143000" indent="-228600" algn="l" defTabSz="914400" rtl="0" eaLnBrk="1" latinLnBrk="0" hangingPunct="1">
+              <a:spcBef>
+                <a:spcPct val="20000"/>
+              </a:spcBef>
+              <a:buFont typeface="Arial" pitchFamily="34" charset="0"/>
+              <a:buChar char="•"/>
+              <a:defRPr sz="2400" kern="1200">
+                <a:solidFill>
+                  <a:schemeClr val="tx1"/>
+                </a:solidFill>
+                <a:latin typeface="+mn-lt"/>
+                <a:ea typeface="+mn-ea"/>
+                <a:cs typeface="+mn-cs"/>
+              </a:defRPr>
+            </a:lvl3pPr>
+            <a:lvl4pPr marL="1600200" indent="-228600" algn="l" defTabSz="914400" rtl="0" eaLnBrk="1" latinLnBrk="0" hangingPunct="1">
+              <a:spcBef>
+                <a:spcPct val="20000"/>
+              </a:spcBef>
+              <a:buFont typeface="Arial" pitchFamily="34" charset="0"/>
+              <a:buChar char="–"/>
+              <a:defRPr sz="2000" kern="1200">
+                <a:solidFill>
+                  <a:schemeClr val="tx1"/>
+                </a:solidFill>
+                <a:latin typeface="+mn-lt"/>
+                <a:ea typeface="+mn-ea"/>
+                <a:cs typeface="+mn-cs"/>
+              </a:defRPr>
+            </a:lvl4pPr>
+            <a:lvl5pPr marL="2057400" indent="-228600" algn="l" defTabSz="914400" rtl="0" eaLnBrk="1" latinLnBrk="0" hangingPunct="1">
+              <a:spcBef>
+                <a:spcPct val="20000"/>
+              </a:spcBef>
+              <a:buFont typeface="Arial" pitchFamily="34" charset="0"/>
+              <a:buChar char="»"/>
+              <a:defRPr sz="2000" kern="1200">
+                <a:solidFill>
+                  <a:schemeClr val="tx1"/>
+                </a:solidFill>
+                <a:latin typeface="+mn-lt"/>
+                <a:ea typeface="+mn-ea"/>
+                <a:cs typeface="+mn-cs"/>
+              </a:defRPr>
+            </a:lvl5pPr>
+            <a:lvl6pPr marL="2514600" indent="-228600" algn="l" defTabSz="914400" rtl="0" eaLnBrk="1" latinLnBrk="0" hangingPunct="1">
+              <a:spcBef>
+                <a:spcPct val="20000"/>
+              </a:spcBef>
+              <a:buFont typeface="Arial" pitchFamily="34" charset="0"/>
+              <a:buChar char="•"/>
+              <a:defRPr sz="2000" kern="1200">
+                <a:solidFill>
+                  <a:schemeClr val="tx1"/>
+                </a:solidFill>
+                <a:latin typeface="+mn-lt"/>
+                <a:ea typeface="+mn-ea"/>
+                <a:cs typeface="+mn-cs"/>
+              </a:defRPr>
+            </a:lvl6pPr>
+            <a:lvl7pPr marL="2971800" indent="-228600" algn="l" defTabSz="914400" rtl="0" eaLnBrk="1" latinLnBrk="0" hangingPunct="1">
+              <a:spcBef>
+                <a:spcPct val="20000"/>
+              </a:spcBef>
+              <a:buFont typeface="Arial" pitchFamily="34" charset="0"/>
+              <a:buChar char="•"/>
+              <a:defRPr sz="2000" kern="1200">
+                <a:solidFill>
+                  <a:schemeClr val="tx1"/>
+                </a:solidFill>
+                <a:latin typeface="+mn-lt"/>
+                <a:ea typeface="+mn-ea"/>
+                <a:cs typeface="+mn-cs"/>
+              </a:defRPr>
+            </a:lvl7pPr>
+            <a:lvl8pPr marL="3429000" indent="-228600" algn="l" defTabSz="914400" rtl="0" eaLnBrk="1" latinLnBrk="0" hangingPunct="1">
+              <a:spcBef>
+                <a:spcPct val="20000"/>
+              </a:spcBef>
+              <a:buFont typeface="Arial" pitchFamily="34" charset="0"/>
+              <a:buChar char="•"/>
+              <a:defRPr sz="2000" kern="1200">
+                <a:solidFill>
+                  <a:schemeClr val="tx1"/>
+                </a:solidFill>
+                <a:latin typeface="+mn-lt"/>
+                <a:ea typeface="+mn-ea"/>
+                <a:cs typeface="+mn-cs"/>
+              </a:defRPr>
+            </a:lvl8pPr>
+            <a:lvl9pPr marL="3886200" indent="-228600" algn="l" defTabSz="914400" rtl="0" eaLnBrk="1" latinLnBrk="0" hangingPunct="1">
+              <a:spcBef>
+                <a:spcPct val="20000"/>
+              </a:spcBef>
+              <a:buFont typeface="Arial" pitchFamily="34" charset="0"/>
+              <a:buChar char="•"/>
+              <a:defRPr sz="2000" kern="1200">
+                <a:solidFill>
+                  <a:schemeClr val="tx1"/>
+                </a:solidFill>
+                <a:latin typeface="+mn-lt"/>
+                <a:ea typeface="+mn-ea"/>
+                <a:cs typeface="+mn-cs"/>
+              </a:defRPr>
+            </a:lvl9pPr>
+          </a:lstStyle>
+          <a:p>
+            <a:r>
+              <a:rPr lang="en-US" sz="2200" dirty="0">
+                <a:solidFill>
+                  <a:srgbClr val="F2F2F2"/>
+                </a:solidFill>
+                <a:ea typeface="Calibri"/>
+                <a:cs typeface="Calibri"/>
+              </a:rPr>
+              <a:t>Blazor University</a:t>
+            </a:r>
+          </a:p>
+          <a:p>
+            <a:pPr marL="0" indent="0">
+              <a:buNone/>
+            </a:pPr>
+            <a:endParaRPr lang="en-US" sz="2200">
+              <a:solidFill>
+                <a:srgbClr val="F2F2F2"/>
+              </a:solidFill>
+              <a:ea typeface="Calibri"/>
+              <a:cs typeface="Calibri"/>
+            </a:endParaRPr>
+          </a:p>
+          <a:p>
+            <a:r>
+              <a:rPr lang="en-US" sz="2200" dirty="0">
+                <a:solidFill>
+                  <a:srgbClr val="F2F2F2"/>
+                </a:solidFill>
+                <a:ea typeface="Calibri"/>
+                <a:cs typeface="Calibri"/>
+              </a:rPr>
+              <a:t>Component libraries</a:t>
+            </a:r>
+          </a:p>
+          <a:p>
+            <a:pPr lvl="1">
+              <a:buFont typeface="Courier New" pitchFamily="34" charset="0"/>
+              <a:buChar char="o"/>
+            </a:pPr>
+            <a:r>
+              <a:rPr lang="en-US" sz="1800" dirty="0">
+                <a:solidFill>
+                  <a:srgbClr val="F2F2F2"/>
+                </a:solidFill>
+                <a:ea typeface="+mn-lt"/>
+                <a:cs typeface="+mn-lt"/>
+                <a:hlinkClick r:id="rId8"/>
+              </a:rPr>
+              <a:t>https://mudblazor.com/</a:t>
+            </a:r>
+            <a:endParaRPr lang="en-US" sz="1800" dirty="0">
+              <a:solidFill>
+                <a:srgbClr val="F2F2F2"/>
+              </a:solidFill>
+              <a:ea typeface="Calibri"/>
+              <a:cs typeface="Calibri"/>
+            </a:endParaRPr>
+          </a:p>
+          <a:p>
+            <a:pPr lvl="1">
+              <a:buFont typeface="Courier New" pitchFamily="34" charset="0"/>
+              <a:buChar char="o"/>
+            </a:pPr>
+            <a:r>
+              <a:rPr lang="en-US" sz="1800" dirty="0">
+                <a:solidFill>
+                  <a:srgbClr val="F2F2F2"/>
+                </a:solidFill>
+                <a:ea typeface="+mn-lt"/>
+                <a:cs typeface="+mn-lt"/>
+                <a:hlinkClick r:id="rId9"/>
+              </a:rPr>
+              <a:t>https://www.telerik.com/blazor-ui</a:t>
+            </a:r>
+            <a:endParaRPr lang="en-US" sz="1800" dirty="0">
+              <a:solidFill>
+                <a:srgbClr val="F2F2F2"/>
+              </a:solidFill>
+              <a:ea typeface="Calibri"/>
+              <a:cs typeface="Calibri"/>
+            </a:endParaRPr>
+          </a:p>
+          <a:p>
+            <a:pPr lvl="1">
+              <a:buFont typeface="Courier New" pitchFamily="34" charset="0"/>
+              <a:buChar char="o"/>
+            </a:pPr>
+            <a:r>
+              <a:rPr lang="en-US" sz="1800" dirty="0">
+                <a:solidFill>
+                  <a:srgbClr val="F2F2F2"/>
+                </a:solidFill>
+                <a:ea typeface="+mn-lt"/>
+                <a:cs typeface="+mn-lt"/>
+                <a:hlinkClick r:id="rId10"/>
+              </a:rPr>
+              <a:t>https://blazorise.com/</a:t>
+            </a:r>
+            <a:endParaRPr lang="en-US" sz="1800" dirty="0">
+              <a:solidFill>
+                <a:srgbClr val="F2F2F2"/>
+              </a:solidFill>
+              <a:ea typeface="Calibri"/>
+              <a:cs typeface="Calibri"/>
+            </a:endParaRPr>
+          </a:p>
+          <a:p>
+            <a:pPr lvl="1">
+              <a:buFont typeface="Courier New" pitchFamily="34" charset="0"/>
+              <a:buChar char="o"/>
+            </a:pPr>
+            <a:endParaRPr lang="en-US" sz="1800" dirty="0">
+              <a:solidFill>
+                <a:srgbClr val="F2F2F2"/>
+              </a:solidFill>
+              <a:ea typeface="Calibri"/>
+              <a:cs typeface="Calibri"/>
+            </a:endParaRPr>
+          </a:p>
+          <a:p>
+            <a:endParaRPr lang="en-US">
+              <a:solidFill>
+                <a:srgbClr val="000000"/>
+              </a:solidFill>
+              <a:ea typeface="Calibri"/>
+              <a:cs typeface="Calibri"/>
+            </a:endParaRPr>
+          </a:p>
+        </p:txBody>
+      </p:sp>
+    </p:spTree>
+    <p:extLst>
+      <p:ext uri="{BB962C8B-B14F-4D97-AF65-F5344CB8AC3E}">
+        <p14:creationId xmlns:p14="http://schemas.microsoft.com/office/powerpoint/2010/main" val="3434590951"/>
+      </p:ext>
+    </p:extLst>
+  </p:cSld>
+  <p:clrMapOvr>
+    <a:masterClrMapping/>
+  </p:clrMapOvr>
+  <p:timing>
+    <p:tnLst>
+      <p:par>
+        <p:cTn id="1" dur="indefinite" restart="never" nodeType="tmRoot">
+          <p:childTnLst>
+            <p:seq concurrent="1" nextAc="seek">
+              <p:cTn id="2" dur="indefinite" nodeType="mainSeq">
+                <p:childTnLst>
+                  <p:par>
+                    <p:cTn id="3" fill="hold">
+                      <p:stCondLst>
+                        <p:cond delay="indefinite"/>
+                      </p:stCondLst>
+                      <p:childTnLst>
+                        <p:par>
+                          <p:cTn id="4" fill="hold">
+                            <p:stCondLst>
+                              <p:cond delay="0"/>
+                            </p:stCondLst>
+                            <p:childTnLst>
+                              <p:par>
+                                <p:cTn id="5" presetID="1" presetClass="entr" presetSubtype="0" fill="hold" grpId="0" nodeType="clickEffect">
+                                  <p:stCondLst>
+                                    <p:cond delay="0"/>
+                                  </p:stCondLst>
+                                  <p:childTnLst>
+                                    <p:set>
+                                      <p:cBhvr>
+                                        <p:cTn id="6" dur="1" fill="hold">
+                                          <p:stCondLst>
+                                            <p:cond delay="0"/>
+                                          </p:stCondLst>
+                                        </p:cTn>
+                                        <p:tgtEl>
+                                          <p:spTgt spid="3"/>
+                                        </p:tgtEl>
+                                        <p:attrNameLst>
+                                          <p:attrName>style.visibility</p:attrName>
+                                        </p:attrNameLst>
+                                      </p:cBhvr>
+                                      <p:to>
+                                        <p:strVal val="visible"/>
+                                      </p:to>
+                                    </p:set>
+                                  </p:childTnLst>
+                                </p:cTn>
+                              </p:par>
+                            </p:childTnLst>
+                          </p:cTn>
+                        </p:par>
+                      </p:childTnLst>
+                    </p:cTn>
+                  </p:par>
+                  <p:par>
+                    <p:cTn id="7" fill="hold">
+                      <p:stCondLst>
+                        <p:cond delay="indefinite"/>
+                      </p:stCondLst>
+                      <p:childTnLst>
+                        <p:par>
+                          <p:cTn id="8" fill="hold">
+                            <p:stCondLst>
+                              <p:cond delay="0"/>
+                            </p:stCondLst>
+                            <p:childTnLst>
+                              <p:par>
+                                <p:cTn id="9" presetID="10" presetClass="entr" presetSubtype="0" fill="hold" grpId="1" nodeType="clickEffect">
+                                  <p:stCondLst>
+                                    <p:cond delay="0"/>
+                                  </p:stCondLst>
+                                  <p:childTnLst>
+                                    <p:set>
+                                      <p:cBhvr>
+                                        <p:cTn id="10" dur="1" fill="hold">
+                                          <p:stCondLst>
+                                            <p:cond delay="0"/>
+                                          </p:stCondLst>
+                                        </p:cTn>
+                                        <p:tgtEl>
+                                          <p:spTgt spid="3"/>
+                                        </p:tgtEl>
+                                        <p:attrNameLst>
+                                          <p:attrName>style.visibility</p:attrName>
+                                        </p:attrNameLst>
+                                      </p:cBhvr>
+                                      <p:to>
+                                        <p:strVal val="visible"/>
+                                      </p:to>
+                                    </p:set>
+                                    <p:animEffect transition="in" filter="fade">
+                                      <p:cBhvr>
+                                        <p:cTn id="11" dur="500"/>
+                                        <p:tgtEl>
+                                          <p:spTgt spid="3"/>
+                                        </p:tgtEl>
+                                      </p:cBhvr>
+                                    </p:animEffect>
+                                  </p:childTnLst>
+                                </p:cTn>
+                              </p:par>
+                            </p:childTnLst>
+                          </p:cTn>
+                        </p:par>
+                      </p:childTnLst>
+                    </p:cTn>
+                  </p:par>
+                </p:childTnLst>
+              </p:cTn>
+              <p:prevCondLst>
+                <p:cond evt="onPrev" delay="0">
+                  <p:tgtEl>
+                    <p:sldTgt/>
+                  </p:tgtEl>
+                </p:cond>
+              </p:prevCondLst>
+              <p:nextCondLst>
+                <p:cond evt="onNext" delay="0">
+                  <p:tgtEl>
+                    <p:sldTgt/>
+                  </p:tgtEl>
+                </p:cond>
+              </p:nextCondLst>
+            </p:seq>
+          </p:childTnLst>
+        </p:cTn>
+      </p:par>
+    </p:tnLst>
+    <p:bldLst>
+      <p:bldP spid="3" grpId="0"/>
+      <p:bldP spid="3" grpId="1"/>
+    </p:bldLst>
+  </p:timing>
+</p:sld>
+</file>
+
+<file path=ppt/slides/slide13.xml><?xml version="1.0" encoding="utf-8"?>
+<p:sld xmlns:a="http://schemas.openxmlformats.org/drawingml/2006/main" xmlns:r="http://schemas.openxmlformats.org/officeDocument/2006/relationships" xmlns:p="http://schemas.openxmlformats.org/presentationml/2006/main">
+  <p:cSld>
+    <p:bg>
+      <p:bgPr>
+        <a:solidFill>
           <a:schemeClr val="tx1"/>
         </a:solidFill>
         <a:effectLst/>
@@ -9255,7 +10016,7 @@
 </p:sld>
 </file>
 
-<file path=ppt/slides/slide13.xml><?xml version="1.0" encoding="utf-8"?>
+<file path=ppt/slides/slide14.xml><?xml version="1.0" encoding="utf-8"?>
 <p:sld xmlns:a="http://schemas.openxmlformats.org/drawingml/2006/main" xmlns:r="http://schemas.openxmlformats.org/officeDocument/2006/relationships" xmlns:p="http://schemas.openxmlformats.org/presentationml/2006/main">
   <p:cSld>
     <p:bg>
@@ -9765,7 +10526,7 @@
 </p:sld>
 </file>
 
-<file path=ppt/slides/slide14.xml><?xml version="1.0" encoding="utf-8"?>
+<file path=ppt/slides/slide15.xml><?xml version="1.0" encoding="utf-8"?>
 <p:sld xmlns:a="http://schemas.openxmlformats.org/drawingml/2006/main" xmlns:r="http://schemas.openxmlformats.org/officeDocument/2006/relationships" xmlns:p="http://schemas.openxmlformats.org/presentationml/2006/main">
   <p:cSld>
     <p:spTree>
@@ -11339,8 +12100,30 @@
                 <a:ea typeface="+mn-lt"/>
                 <a:cs typeface="+mn-lt"/>
               </a:rPr>
+              <a:t>Links</a:t>
+            </a:r>
+          </a:p>
+          <a:p>
+            <a:r>
+              <a:rPr lang="en-US" sz="2400" dirty="0">
+                <a:solidFill>
+                  <a:schemeClr val="bg1">
+                    <a:lumMod val="95000"/>
+                  </a:schemeClr>
+                </a:solidFill>
+                <a:latin typeface="Calibri"/>
+                <a:ea typeface="+mn-lt"/>
+                <a:cs typeface="+mn-lt"/>
+              </a:rPr>
               <a:t>Summary</a:t>
             </a:r>
+            <a:endParaRPr lang="en-US" dirty="0">
+              <a:solidFill>
+                <a:schemeClr val="bg1">
+                  <a:lumMod val="95000"/>
+                </a:schemeClr>
+              </a:solidFill>
+            </a:endParaRPr>
           </a:p>
           <a:p>
             <a:r>
